--- a/submission/KHUSHAL_SIH2026_Presentation.pptx
+++ b/submission/KHUSHAL_SIH2026_Presentation.pptx
@@ -261,7 +261,7 @@
             <a:fld id="{C4D5ADD5-2BBC-4A94-8F86-D9013941F742}" type="datetimeFigureOut">
               <a:rPr lang="en-US"/>
               <a:pPr/>
-              <a:t>9/10/2026</a:t>
+              <a:t>9/10/26</a:t>
             </a:fld>
             <a:endParaRPr lang="en-US"/>
           </a:p>
@@ -1569,7 +1569,7 @@
           <a:p>
             <a:fld id="{E60792E3-D524-454C-8AFD-A91972900BCB}" type="datetime1">
               <a:rPr lang="en-US" smtClean="0"/>
-              <a:t>9/10/2026</a:t>
+              <a:t>9/10/26</a:t>
             </a:fld>
             <a:endParaRPr lang="en-US"/>
           </a:p>
@@ -1751,7 +1751,7 @@
           <a:p>
             <a:fld id="{053C3A68-6922-42D3-8905-ECC2D82A3469}" type="datetime1">
               <a:rPr lang="en-US" smtClean="0"/>
-              <a:t>9/10/2026</a:t>
+              <a:t>9/10/26</a:t>
             </a:fld>
             <a:endParaRPr lang="en-US"/>
           </a:p>
@@ -1943,7 +1943,7 @@
           <a:p>
             <a:fld id="{CB69E9F4-7604-4950-A8B2-8ACDEDB1506E}" type="datetime1">
               <a:rPr lang="en-US" smtClean="0"/>
-              <a:t>9/10/2026</a:t>
+              <a:t>9/10/26</a:t>
             </a:fld>
             <a:endParaRPr lang="en-US"/>
           </a:p>
@@ -2125,7 +2125,7 @@
           <a:p>
             <a:fld id="{708B7524-32A2-4C20-A58C-BC3BAA1042FC}" type="datetime1">
               <a:rPr lang="en-US" smtClean="0"/>
-              <a:t>9/10/2026</a:t>
+              <a:t>9/10/26</a:t>
             </a:fld>
             <a:endParaRPr lang="en-US"/>
           </a:p>
@@ -2384,7 +2384,7 @@
           <a:p>
             <a:fld id="{1E994447-D6B2-43BB-A877-57F1A267B999}" type="datetime1">
               <a:rPr lang="en-US" smtClean="0"/>
-              <a:t>9/10/2026</a:t>
+              <a:t>9/10/26</a:t>
             </a:fld>
             <a:endParaRPr lang="en-US"/>
           </a:p>
@@ -2683,7 +2683,7 @@
           <a:p>
             <a:fld id="{68920E16-BD35-483C-AA6B-346FC7E46DEA}" type="datetime1">
               <a:rPr lang="en-US" smtClean="0"/>
-              <a:t>9/10/2026</a:t>
+              <a:t>9/10/26</a:t>
             </a:fld>
             <a:endParaRPr lang="en-US"/>
           </a:p>
@@ -3116,7 +3116,7 @@
           <a:p>
             <a:fld id="{2FEAC6F8-5103-4FC0-A69E-5C6AE6469DA8}" type="datetime1">
               <a:rPr lang="en-US" smtClean="0"/>
-              <a:t>9/10/2026</a:t>
+              <a:t>9/10/26</a:t>
             </a:fld>
             <a:endParaRPr lang="en-US"/>
           </a:p>
@@ -3247,7 +3247,7 @@
           <a:p>
             <a:fld id="{C60C6921-0627-4C8F-83D5-0CF936D2FFDD}" type="datetime1">
               <a:rPr lang="en-US" smtClean="0"/>
-              <a:t>9/10/2026</a:t>
+              <a:t>9/10/26</a:t>
             </a:fld>
             <a:endParaRPr lang="en-US"/>
           </a:p>
@@ -3356,7 +3356,7 @@
           <a:p>
             <a:fld id="{2FF08AD7-8103-40F8-983C-E2BA6BB9CBE0}" type="datetime1">
               <a:rPr lang="en-US" smtClean="0"/>
-              <a:t>9/10/2026</a:t>
+              <a:t>9/10/26</a:t>
             </a:fld>
             <a:endParaRPr lang="en-US"/>
           </a:p>
@@ -3645,7 +3645,7 @@
           <a:p>
             <a:fld id="{DF8C06B4-9380-4A4D-AF49-A3596E17DAF5}" type="datetime1">
               <a:rPr lang="en-US" smtClean="0"/>
-              <a:t>9/10/2026</a:t>
+              <a:t>9/10/26</a:t>
             </a:fld>
             <a:endParaRPr lang="en-US"/>
           </a:p>
@@ -3914,7 +3914,7 @@
           <a:p>
             <a:fld id="{EF7FDEF1-C582-4E22-9E77-D68326471F28}" type="datetime1">
               <a:rPr lang="en-US" smtClean="0"/>
-              <a:t>9/10/2026</a:t>
+              <a:t>9/10/26</a:t>
             </a:fld>
             <a:endParaRPr lang="en-US"/>
           </a:p>
@@ -4157,7 +4157,7 @@
           <a:p>
             <a:fld id="{780A9602-A9A9-453F-AEF1-37B5837E02CD}" type="datetime1">
               <a:rPr lang="en-US" smtClean="0"/>
-              <a:t>9/10/2026</a:t>
+              <a:t>9/10/26</a:t>
             </a:fld>
             <a:endParaRPr lang="en-US"/>
           </a:p>
@@ -5639,7 +5639,7 @@
                 </a:solidFill>
                 <a:latin typeface="Garamond" panose="02020404030301010803" pitchFamily="18" charset="0"/>
               </a:rPr>
-              <a:t>SMART INDIA HACKATHON 2025</a:t>
+              <a:t>SMART INDIA HACKATHON 2026</a:t>
             </a:r>
             <a:endParaRPr lang="en-IN" sz="4000" b="1" dirty="0">
               <a:solidFill>
@@ -5659,7 +5659,7 @@
         <p:spPr>
           <a:xfrm>
             <a:off x="293862" y="848671"/>
-            <a:ext cx="7571944" cy="5425331"/>
+            <a:ext cx="7571944" cy="4686668"/>
           </a:xfrm>
           <a:prstGeom prst="rect">
             <a:avLst/>
@@ -5703,21 +5703,7 @@
                 <a:latin typeface="Arial" panose="020B0604020202020204" pitchFamily="34" charset="0"/>
                 <a:cs typeface="Arial" panose="020B0604020202020204" pitchFamily="34" charset="0"/>
               </a:rPr>
-              <a:t>Problem Statement </a:t>
-            </a:r>
-            <a:r>
-              <a:rPr lang="en-US" sz="2400" b="1">
-                <a:latin typeface="Arial" panose="020B0604020202020204" pitchFamily="34" charset="0"/>
-                <a:cs typeface="Arial" panose="020B0604020202020204" pitchFamily="34" charset="0"/>
-              </a:rPr>
-              <a:t>Title- MANAAK- online </a:t>
-            </a:r>
-            <a:r>
-              <a:rPr lang="en-US" sz="2400" b="1" dirty="0">
-                <a:latin typeface="Arial" panose="020B0604020202020204" pitchFamily="34" charset="0"/>
-                <a:cs typeface="Arial" panose="020B0604020202020204" pitchFamily="34" charset="0"/>
-              </a:rPr>
-              <a:t>verification system of weighing and measuring instruments</a:t>
+              <a:t>Problem Statement Title- Online verification system of weighing and measuring instruments. </a:t>
             </a:r>
           </a:p>
           <a:p>
